--- a/markdown/files/slides/lecture17_forkjoin.pptx
+++ b/markdown/files/slides/lecture17_forkjoin.pptx
@@ -308,7 +308,7 @@
           <a:p>
             <a:fld id="{28421D02-69CC-42C9-85CE-4F8B68ED22B8}" type="datetimeFigureOut">
               <a:rPr lang="en-US" smtClean="0"/>
-              <a:t>2/17/26</a:t>
+              <a:t>5/13/2026</a:t>
             </a:fld>
             <a:endParaRPr lang="en-US"/>
           </a:p>
@@ -506,7 +506,7 @@
           <a:p>
             <a:fld id="{28421D02-69CC-42C9-85CE-4F8B68ED22B8}" type="datetimeFigureOut">
               <a:rPr lang="en-US" smtClean="0"/>
-              <a:t>2/17/26</a:t>
+              <a:t>5/13/2026</a:t>
             </a:fld>
             <a:endParaRPr lang="en-US"/>
           </a:p>
@@ -714,7 +714,7 @@
           <a:p>
             <a:fld id="{28421D02-69CC-42C9-85CE-4F8B68ED22B8}" type="datetimeFigureOut">
               <a:rPr lang="en-US" smtClean="0"/>
-              <a:t>2/17/26</a:t>
+              <a:t>5/13/2026</a:t>
             </a:fld>
             <a:endParaRPr lang="en-US"/>
           </a:p>
@@ -912,7 +912,7 @@
           <a:p>
             <a:fld id="{28421D02-69CC-42C9-85CE-4F8B68ED22B8}" type="datetimeFigureOut">
               <a:rPr lang="en-US" smtClean="0"/>
-              <a:t>2/17/26</a:t>
+              <a:t>5/13/2026</a:t>
             </a:fld>
             <a:endParaRPr lang="en-US"/>
           </a:p>
@@ -1187,7 +1187,7 @@
           <a:p>
             <a:fld id="{28421D02-69CC-42C9-85CE-4F8B68ED22B8}" type="datetimeFigureOut">
               <a:rPr lang="en-US" smtClean="0"/>
-              <a:t>2/17/26</a:t>
+              <a:t>5/13/2026</a:t>
             </a:fld>
             <a:endParaRPr lang="en-US"/>
           </a:p>
@@ -1452,7 +1452,7 @@
           <a:p>
             <a:fld id="{28421D02-69CC-42C9-85CE-4F8B68ED22B8}" type="datetimeFigureOut">
               <a:rPr lang="en-US" smtClean="0"/>
-              <a:t>2/17/26</a:t>
+              <a:t>5/13/2026</a:t>
             </a:fld>
             <a:endParaRPr lang="en-US"/>
           </a:p>
@@ -1864,7 +1864,7 @@
           <a:p>
             <a:fld id="{28421D02-69CC-42C9-85CE-4F8B68ED22B8}" type="datetimeFigureOut">
               <a:rPr lang="en-US" smtClean="0"/>
-              <a:t>2/17/26</a:t>
+              <a:t>5/13/2026</a:t>
             </a:fld>
             <a:endParaRPr lang="en-US"/>
           </a:p>
@@ -2005,7 +2005,7 @@
           <a:p>
             <a:fld id="{28421D02-69CC-42C9-85CE-4F8B68ED22B8}" type="datetimeFigureOut">
               <a:rPr lang="en-US" smtClean="0"/>
-              <a:t>2/17/26</a:t>
+              <a:t>5/13/2026</a:t>
             </a:fld>
             <a:endParaRPr lang="en-US"/>
           </a:p>
@@ -2118,7 +2118,7 @@
           <a:p>
             <a:fld id="{28421D02-69CC-42C9-85CE-4F8B68ED22B8}" type="datetimeFigureOut">
               <a:rPr lang="en-US" smtClean="0"/>
-              <a:t>2/17/26</a:t>
+              <a:t>5/13/2026</a:t>
             </a:fld>
             <a:endParaRPr lang="en-US"/>
           </a:p>
@@ -2429,7 +2429,7 @@
           <a:p>
             <a:fld id="{28421D02-69CC-42C9-85CE-4F8B68ED22B8}" type="datetimeFigureOut">
               <a:rPr lang="en-US" smtClean="0"/>
-              <a:t>2/17/26</a:t>
+              <a:t>5/13/2026</a:t>
             </a:fld>
             <a:endParaRPr lang="en-US"/>
           </a:p>
@@ -2717,7 +2717,7 @@
           <a:p>
             <a:fld id="{28421D02-69CC-42C9-85CE-4F8B68ED22B8}" type="datetimeFigureOut">
               <a:rPr lang="en-US" smtClean="0"/>
-              <a:t>2/17/26</a:t>
+              <a:t>5/13/2026</a:t>
             </a:fld>
             <a:endParaRPr lang="en-US"/>
           </a:p>
@@ -2958,7 +2958,7 @@
           <a:p>
             <a:fld id="{28421D02-69CC-42C9-85CE-4F8B68ED22B8}" type="datetimeFigureOut">
               <a:rPr lang="en-US" smtClean="0"/>
-              <a:t>2/17/26</a:t>
+              <a:t>5/13/2026</a:t>
             </a:fld>
             <a:endParaRPr lang="en-US"/>
           </a:p>
@@ -3400,14 +3400,14 @@
           <a:p>
             <a:r>
               <a:rPr lang="en-US" dirty="0"/>
-              <a:t>CSE 332 Winter 2026</a:t>
+              <a:t>CSE 332 Spring 2026</a:t>
             </a:r>
             <a:br>
               <a:rPr lang="en-US" dirty="0"/>
             </a:br>
             <a:r>
               <a:rPr lang="en-US" dirty="0"/>
-              <a:t>Lecture 17: </a:t>
+              <a:t>Lecture 19: </a:t>
             </a:r>
             <a:r>
               <a:rPr lang="en-US" dirty="0" err="1"/>
@@ -3440,7 +3440,7 @@
           <a:p>
             <a:r>
               <a:rPr lang="en-US" dirty="0"/>
-              <a:t>Michael Whitmeyer</a:t>
+              <a:t>Nathan Brunelle</a:t>
             </a:r>
           </a:p>
           <a:p>
@@ -12060,8 +12060,8 @@
           </a:p>
         </p:txBody>
       </p:sp>
-      <mc:AlternateContent xmlns:mc="http://schemas.openxmlformats.org/markup-compatibility/2006">
-        <mc:Choice xmlns:a14="http://schemas.microsoft.com/office/drawing/2010/main" Requires="a14">
+      <mc:AlternateContent xmlns:mc="http://schemas.openxmlformats.org/markup-compatibility/2006" xmlns:a14="http://schemas.microsoft.com/office/drawing/2010/main">
+        <mc:Choice Requires="a14">
           <p:sp>
             <p:nvSpPr>
               <p:cNvPr id="3" name="TextBox 2">
@@ -12246,7 +12246,7 @@
             </p:txBody>
           </p:sp>
         </mc:Choice>
-        <mc:Fallback>
+        <mc:Fallback xmlns="">
           <p:sp>
             <p:nvSpPr>
               <p:cNvPr id="3" name="TextBox 2">
